--- a/media/exports/reports/2026-06/people-helped.pptx
+++ b/media/exports/reports/2026-06/people-helped.pptx
@@ -190,19 +190,19 @@
               <c:strCache>
                 <c:ptCount val="5"/>
                 <c:pt idx="0">
+                  <c:v>Mental health first aid</c:v>
+                </c:pt>
+                <c:pt idx="1">
+                  <c:v>Youth outreach</c:v>
+                </c:pt>
+                <c:pt idx="2">
+                  <c:v>Community meals</c:v>
+                </c:pt>
+                <c:pt idx="3">
                   <c:v>Digital literacy</c:v>
                 </c:pt>
-                <c:pt idx="1">
-                  <c:v>Community meals</c:v>
-                </c:pt>
-                <c:pt idx="2">
-                  <c:v>Youth outreach</c:v>
-                </c:pt>
-                <c:pt idx="3">
+                <c:pt idx="4">
                   <c:v>Housing support</c:v>
-                </c:pt>
-                <c:pt idx="4">
-                  <c:v>Mental health first aid</c:v>
                 </c:pt>
               </c:strCache>
             </c:strRef>
@@ -214,19 +214,19 @@
                 <c:formatCode>0.0"%";[Red](0.0"%")</c:formatCode>
                 <c:ptCount val="5"/>
                 <c:pt idx="0">
-                  <c:v>81.8</c:v>
+                  <c:v>81.4</c:v>
                 </c:pt>
                 <c:pt idx="1">
-                  <c:v>82.0</c:v>
+                  <c:v>82.1</c:v>
                 </c:pt>
                 <c:pt idx="2">
-                  <c:v>82.1</c:v>
+                  <c:v>83.6</c:v>
                 </c:pt>
                 <c:pt idx="3">
-                  <c:v>82.9</c:v>
+                  <c:v>86.5</c:v>
                 </c:pt>
                 <c:pt idx="4">
-                  <c:v>86.4</c:v>
+                  <c:v>86.6</c:v>
                 </c:pt>
               </c:numCache>
             </c:numRef>
@@ -1081,7 +1081,7 @@
           <a:lstStyle/>
           <a:p>
             <a:r>
-              <a:t>How many people did we help this month, and how many couldn't we reach?. People helped, June: 490; Couldn't reach, June: 102; Share reached, June: 82.8%. 490 people were helped in June, and 102 came to a program but couldn't be helped: 82.8% reached (target 90.0%), against 88.7% in May. Digital literacy reached the smallest share: 81.8% (10 couldn't be helped). The main reason: program at capacity (35 people).</a:t>
+              <a:t>How many people did we help this month, and how many couldn't we reach?. People helped, June: 490; Couldn't reach, June: 95; Share reached, June: 83.8%. 490 people were helped in June, and 95 came to a program but couldn't be helped: 83.8% reached (target 90.0%), against 88.7% in May. Mental health first aid reached the smallest share: 81.4% (16 couldn't be helped). The main reason: program at capacity (32 people).</a:t>
             </a:r>
           </a:p>
         </p:txBody>
@@ -4636,7 +4636,7 @@
                 </a:solidFill>
                 <a:latin typeface="Roboto"/>
               </a:rPr>
-              <a:t>Data retrieved 2pm, Tue 6 Oct 2026 · Generated 8 Oct 2026, 6:29pm · Sample data · Made with Python (python-pptx)</a:t>
+              <a:t>Data retrieved 2pm, Tue 6 Oct 2026 · Generated 8 Oct 2026, 11:41pm · Sample data · Made with Python (python-pptx)</a:t>
             </a:r>
           </a:p>
         </p:txBody>
@@ -5148,7 +5148,7 @@
                 </a:solidFill>
                 <a:latin typeface="Roboto"/>
               </a:rPr>
-              <a:t>102</a:t>
+              <a:t>95</a:t>
             </a:r>
           </a:p>
         </p:txBody>
@@ -5314,7 +5314,7 @@
                 </a:solidFill>
                 <a:latin typeface="Roboto"/>
               </a:rPr>
-              <a:t>82.8%</a:t>
+              <a:t>83.8%</a:t>
             </a:r>
           </a:p>
         </p:txBody>
@@ -5573,7 +5573,7 @@
                 </a:solidFill>
                 <a:latin typeface="Roboto"/>
               </a:rPr>
-              <a:t>490 people were helped in June, and 102 came to a program but couldn't be helped: 82.8% reached (target 90.0%), against 88.7% in May.</a:t>
+              <a:t>490 people were helped in June, and 95 came to a program but couldn't be helped: 83.8% reached (target 90.0%), against 88.7% in May.</a:t>
             </a:r>
           </a:p>
         </p:txBody>
@@ -5700,7 +5700,7 @@
                 </a:solidFill>
                 <a:latin typeface="Roboto"/>
               </a:rPr>
-              <a:t>Digital literacy reached the smallest share: 81.8% (10 couldn't be helped). The main reason: program at capacity (35 people).</a:t>
+              <a:t>Mental health first aid reached the smallest share: 81.4% (16 couldn't be helped). The main reason: program at capacity (32 people).</a:t>
             </a:r>
           </a:p>
         </p:txBody>
@@ -5778,7 +5778,7 @@
                 </a:solidFill>
                 <a:latin typeface="Roboto"/>
               </a:rPr>
-              <a:t>Data retrieved 2pm, Tue 6 Oct 2026 · Generated 8 Oct 2026, 6:29pm · Sample data · Made with Python (python-pptx)</a:t>
+              <a:t>Data retrieved 2pm, Tue 6 Oct 2026 · Generated 8 Oct 2026, 11:41pm · Sample data · Made with Python (python-pptx)</a:t>
             </a:r>
           </a:p>
         </p:txBody>
@@ -6093,7 +6093,7 @@
                 </a:solidFill>
                 <a:latin typeface="Roboto"/>
               </a:rPr>
-              <a:t>Data retrieved 2pm, Tue 6 Oct 2026 · Generated 8 Oct 2026, 6:29pm · Sample data · Made with Python (python-pptx)</a:t>
+              <a:t>Data retrieved 2pm, Tue 6 Oct 2026 · Generated 8 Oct 2026, 11:41pm · Sample data · Made with Python (python-pptx)</a:t>
             </a:r>
           </a:p>
         </p:txBody>
@@ -6401,7 +6401,7 @@
                           </a:solidFill>
                           <a:latin typeface="Roboto"/>
                         </a:rPr>
-                        <a:t>35</a:t>
+                        <a:t>32</a:t>
                       </a:r>
                     </a:p>
                   </a:txBody>
@@ -6430,7 +6430,7 @@
                           </a:solidFill>
                           <a:latin typeface="Roboto"/>
                         </a:rPr>
-                        <a:t>Outside the service area</a:t>
+                        <a:t>Waitlist</a:t>
                       </a:r>
                     </a:p>
                   </a:txBody>
@@ -6457,7 +6457,7 @@
                           </a:solidFill>
                           <a:latin typeface="Roboto"/>
                         </a:rPr>
-                        <a:t>21</a:t>
+                        <a:t>24</a:t>
                       </a:r>
                     </a:p>
                   </a:txBody>
@@ -6486,7 +6486,7 @@
                           </a:solidFill>
                           <a:latin typeface="Roboto"/>
                         </a:rPr>
-                        <a:t>Waitlist</a:t>
+                        <a:t>Outside the service area</a:t>
                       </a:r>
                     </a:p>
                   </a:txBody>
@@ -6513,7 +6513,7 @@
                           </a:solidFill>
                           <a:latin typeface="Roboto"/>
                         </a:rPr>
-                        <a:t>21</a:t>
+                        <a:t>15</a:t>
                       </a:r>
                     </a:p>
                   </a:txBody>
@@ -6542,7 +6542,7 @@
                           </a:solidFill>
                           <a:latin typeface="Roboto"/>
                         </a:rPr>
-                        <a:t>Couldn't make contact</a:t>
+                        <a:t>Not eligible</a:t>
                       </a:r>
                     </a:p>
                   </a:txBody>
@@ -6569,7 +6569,7 @@
                           </a:solidFill>
                           <a:latin typeface="Roboto"/>
                         </a:rPr>
-                        <a:t>19</a:t>
+                        <a:t>14</a:t>
                       </a:r>
                     </a:p>
                   </a:txBody>
@@ -6598,7 +6598,7 @@
                           </a:solidFill>
                           <a:latin typeface="Roboto"/>
                         </a:rPr>
-                        <a:t>Not eligible</a:t>
+                        <a:t>Couldn't make contact</a:t>
                       </a:r>
                     </a:p>
                   </a:txBody>
@@ -6625,7 +6625,7 @@
                           </a:solidFill>
                           <a:latin typeface="Roboto"/>
                         </a:rPr>
-                        <a:t>6</a:t>
+                        <a:t>10</a:t>
                       </a:r>
                     </a:p>
                   </a:txBody>
@@ -6713,7 +6713,7 @@
                 </a:solidFill>
                 <a:latin typeface="Roboto"/>
               </a:rPr>
-              <a:t>Data retrieved 2pm, Tue 6 Oct 2026 · Generated 8 Oct 2026, 6:29pm · Sample data · Made with Python (python-pptx)</a:t>
+              <a:t>Data retrieved 2pm, Tue 6 Oct 2026 · Generated 8 Oct 2026, 11:41pm · Sample data · Made with Python (python-pptx)</a:t>
             </a:r>
           </a:p>
         </p:txBody>

--- a/media/exports/reports/2026-06/people-helped.pptx
+++ b/media/exports/reports/2026-06/people-helped.pptx
@@ -1011,7 +1011,7 @@
           <a:lstStyle/>
           <a:p>
             <a:r>
-              <a:t>How many people did we help this month, and how many couldn't we reach?. Sample Community Services Ltd. Period: June 2026. People helped by each program, day by day, and the people who came to a program but couldn't be helped (and why). People helped are counted against each program's own grant spend.</a:t>
+              <a:t>How many people did we help this month, and how many couldn't we reach?. Sample Community Services Ltd. Period: June 2026. In short: 490 people helped in June; 95 couldn't be reached (83.8% reached, target 90.0%). People helped by each program, day by day, and the people who came to a program but couldn't be helped (and why). People helped are counted against each program's own grant spend.</a:t>
             </a:r>
           </a:p>
         </p:txBody>
@@ -4446,7 +4446,7 @@
         <p:spPr>
           <a:xfrm>
             <a:off x="457200" y="3703320"/>
-            <a:ext cx="11277295" cy="535940"/>
+            <a:ext cx="11277295" cy="758190"/>
           </a:xfrm>
           <a:prstGeom prst="rect">
             <a:avLst/>
@@ -4471,7 +4471,7 @@
                 </a:solidFill>
                 <a:latin typeface="Roboto"/>
               </a:rPr>
-              <a:t>Period: June 2026. People helped by each program, day by day, and the people who came to a program but couldn't be helped (and why). People helped are counted against each program's own grant spend.</a:t>
+              <a:t>Period: June 2026. In short: 490 people helped in June; 95 couldn't be reached (83.8% reached, target 90.0%). People helped by each program, day by day, and the people who came to a program but couldn't be helped (and why). People helped are counted against each program's own grant spend.</a:t>
             </a:r>
           </a:p>
         </p:txBody>
@@ -4484,7 +4484,7 @@
         </p:nvSpPr>
         <p:spPr>
           <a:xfrm>
-            <a:off x="457200" y="4330700"/>
+            <a:off x="457200" y="4552950"/>
             <a:ext cx="11277295" cy="1097280"/>
           </a:xfrm>
           <a:prstGeom prst="rect">
@@ -4636,7 +4636,7 @@
                 </a:solidFill>
                 <a:latin typeface="Roboto"/>
               </a:rPr>
-              <a:t>Data retrieved 2pm, Tue 6 Oct 2026 · Generated 8 Oct 2026, 11:41pm · Sample data · Made with Python (python-pptx)</a:t>
+              <a:t>Data retrieved 2pm, Tue 6 Oct 2026 · Generated 10 Oct 2026, 9:55pm · Sample data · Made with Python (python-pptx)</a:t>
             </a:r>
           </a:p>
         </p:txBody>
@@ -5778,7 +5778,7 @@
                 </a:solidFill>
                 <a:latin typeface="Roboto"/>
               </a:rPr>
-              <a:t>Data retrieved 2pm, Tue 6 Oct 2026 · Generated 8 Oct 2026, 11:41pm · Sample data · Made with Python (python-pptx)</a:t>
+              <a:t>Data retrieved 2pm, Tue 6 Oct 2026 · Generated 10 Oct 2026, 9:55pm · Sample data · Made with Python (python-pptx)</a:t>
             </a:r>
           </a:p>
         </p:txBody>
@@ -6093,7 +6093,7 @@
                 </a:solidFill>
                 <a:latin typeface="Roboto"/>
               </a:rPr>
-              <a:t>Data retrieved 2pm, Tue 6 Oct 2026 · Generated 8 Oct 2026, 11:41pm · Sample data · Made with Python (python-pptx)</a:t>
+              <a:t>Data retrieved 2pm, Tue 6 Oct 2026 · Generated 10 Oct 2026, 9:55pm · Sample data · Made with Python (python-pptx)</a:t>
             </a:r>
           </a:p>
         </p:txBody>
@@ -6713,7 +6713,7 @@
                 </a:solidFill>
                 <a:latin typeface="Roboto"/>
               </a:rPr>
-              <a:t>Data retrieved 2pm, Tue 6 Oct 2026 · Generated 8 Oct 2026, 11:41pm · Sample data · Made with Python (python-pptx)</a:t>
+              <a:t>Data retrieved 2pm, Tue 6 Oct 2026 · Generated 10 Oct 2026, 9:55pm · Sample data · Made with Python (python-pptx)</a:t>
             </a:r>
           </a:p>
         </p:txBody>
